--- a/ali/Building_Web_Applications_Django_CAOC_Open_Course.pptx
+++ b/ali/Building_Web_Applications_Django_CAOC_Open_Course.pptx
@@ -146,7 +146,7 @@
     </p:spTree>
     <p:extLst>
       <p:ext uri="{BB962C8B-B14F-4D97-AF65-F5344CB8AC3E}">
-        <p14:creationId xmlns:p14="http://schemas.microsoft.com/office/powerpoint/2010/main" val="2460411807"/>
+        <p14:creationId xmlns:p14="http://schemas.microsoft.com/office/powerpoint/2010/main" val="949998104"/>
       </p:ext>
     </p:extLst>
   </p:cSld>
@@ -292,7 +292,7 @@
           <a:p>
             <a:r>
               <a:rPr lang="en-US" dirty="0"/>
-              <a:t>Hi, I’m Dr. Chuck, and I want to tell you about a new way that I’m offering Building Web Applications in Django, beginning August 1. I’m calling it a CAOC: a Campus-Aligned Online Course.</a:t>
+              <a:t>Hi, I’m Dr. Chuck, and I want to tell you about a new way that I’m offering Building Web Applications in Django, beginning August 1. I’m calling it a CAOC: a Campus Aligned Open Course.</a:t>
             </a:r>
           </a:p>
         </p:txBody>
@@ -379,7 +379,7 @@
           <a:p>
             <a:r>
               <a:rPr lang="en-US" dirty="0"/>
-              <a:t>I think there is an important space between a completely self-paced online course and formal university enrollment. A Campus-Aligned Online Course is meant to occupy that space. One course. Campus and online learners. A shared schedule, a shared instructional community, and a better chance for online learners to feel connected. Welcome to Building Web Applications in Django. Welcome to the experiment. And welcome to the CAOC.</a:t>
+              <a:t>I think there is an important space between a completely self-paced online course and formal university enrollment. A Campus Aligned Open Course is meant to occupy that space. One course. Campus and online learners. A shared schedule, a shared instructional community, and a better chance for online learners to feel connected. Welcome to Building Web Applications in Django. Welcome to the experiment. And welcome to the CAOC.</a:t>
             </a:r>
           </a:p>
         </p:txBody>
@@ -1455,7 +1455,13 @@
       </p:grpSpPr>
       <p:pic>
         <p:nvPicPr>
-          <p:cNvPr id="2" name="Image 0" descr="/mnt/data/paddle_to_success_and_learning.png"/>
+          <p:cNvPr id="13" name="Picture 12" descr="A person and person in a kayak&#10;&#10;AI-generated content may be incorrect.">
+            <a:extLst>
+              <a:ext uri="{FF2B5EF4-FFF2-40B4-BE49-F238E27FC236}">
+                <a16:creationId xmlns:a16="http://schemas.microsoft.com/office/drawing/2014/main" id="{3C98EAEB-676D-8122-ECE9-F484801BF7AD}"/>
+              </a:ext>
+            </a:extLst>
+          </p:cNvPr>
           <p:cNvPicPr>
             <a:picLocks noChangeAspect="1"/>
           </p:cNvPicPr>
@@ -1463,13 +1469,14 @@
         </p:nvPicPr>
         <p:blipFill>
           <a:blip r:embed="rId3"/>
-          <a:srcRect t="25" b="25"/>
-          <a:stretch/>
+          <a:stretch>
+            <a:fillRect/>
+          </a:stretch>
         </p:blipFill>
         <p:spPr>
           <a:xfrm>
-            <a:off x="0" y="0"/>
-            <a:ext cx="12191695" cy="6858000"/>
+            <a:off x="71120" y="0"/>
+            <a:ext cx="12120880" cy="6858000"/>
           </a:xfrm>
           <a:prstGeom prst="rect">
             <a:avLst/>
@@ -1600,7 +1607,7 @@
                   <a:srgbClr val="E9F6F6"/>
                 </a:solidFill>
               </a:rPr>
-              <a:t>A Campus-Aligned Open Course</a:t>
+              <a:t>A Campus Aligned Open Course</a:t>
             </a:r>
             <a:endParaRPr lang="en-US" sz="1900" dirty="0"/>
           </a:p>
@@ -2011,7 +2018,7 @@
           <p:cNvPr id="9" name="Picture 8" descr="A person and person in a kayak&#10;&#10;AI-generated content may be incorrect.">
             <a:extLst>
               <a:ext uri="{FF2B5EF4-FFF2-40B4-BE49-F238E27FC236}">
-                <a16:creationId xmlns:a16="http://schemas.microsoft.com/office/drawing/2014/main" id="{AE2E5722-1030-7723-02D7-6C641C0EB415}"/>
+                <a16:creationId xmlns:a16="http://schemas.microsoft.com/office/drawing/2014/main" id="{872803D6-9B07-3F3B-1301-93836EC9AA55}"/>
               </a:ext>
             </a:extLst>
           </p:cNvPr>
@@ -2028,8 +2035,8 @@
         </p:blipFill>
         <p:spPr>
           <a:xfrm>
-            <a:off x="5147118" y="1325880"/>
-            <a:ext cx="7044882" cy="3964852"/>
+            <a:off x="4902201" y="1379834"/>
+            <a:ext cx="7289799" cy="4098331"/>
           </a:xfrm>
           <a:prstGeom prst="rect">
             <a:avLst/>
@@ -3454,7 +3461,7 @@
           <p:cNvPr id="14" name="Picture 13" descr="A person and person in a kayak&#10;&#10;AI-generated content may be incorrect.">
             <a:extLst>
               <a:ext uri="{FF2B5EF4-FFF2-40B4-BE49-F238E27FC236}">
-                <a16:creationId xmlns:a16="http://schemas.microsoft.com/office/drawing/2014/main" id="{5026A101-B218-37C6-AD3A-CA67E141F9A1}"/>
+                <a16:creationId xmlns:a16="http://schemas.microsoft.com/office/drawing/2014/main" id="{3D3F813E-5FDE-2B39-FB9E-AA43A482A751}"/>
               </a:ext>
             </a:extLst>
           </p:cNvPr>
@@ -3471,8 +3478,8 @@
         </p:blipFill>
         <p:spPr>
           <a:xfrm>
-            <a:off x="5147118" y="1325880"/>
-            <a:ext cx="7044882" cy="3964852"/>
+            <a:off x="4902201" y="1379834"/>
+            <a:ext cx="7289799" cy="4098331"/>
           </a:xfrm>
           <a:prstGeom prst="rect">
             <a:avLst/>
@@ -3545,7 +3552,7 @@
                 <a:ea typeface="Aptos Display" pitchFamily="34" charset="-122"/>
                 <a:cs typeface="Aptos Display" pitchFamily="34" charset="-120"/>
               </a:rPr>
-              <a:t>What “campus-aligned” means</a:t>
+              <a:t>What “campus aligned” means</a:t>
             </a:r>
             <a:endParaRPr lang="en-US" sz="3100" dirty="0"/>
           </a:p>
